--- a/Interpolacion/Interpolacion.pptx
+++ b/Interpolacion/Interpolacion.pptx
@@ -109,6 +109,11 @@
       </a:defRPr>
     </a:lvl9pPr>
   </p:defaultTextStyle>
+  <p:extLst>
+    <p:ext uri="{EFAFB233-063F-42B5-8137-9DF3F51BA10A}">
+      <p15:sldGuideLst xmlns:p15="http://schemas.microsoft.com/office/powerpoint/2012/main"/>
+    </p:ext>
+  </p:extLst>
 </p:presentation>
 </file>
 
@@ -265,7 +270,7 @@
           <a:p>
             <a:fld id="{C128FA71-3A18-48C0-980F-4B68F7F63042}" type="datetime1">
               <a:rPr lang="en-US" smtClean="0"/>
-              <a:t>5/19/26</a:t>
+              <a:t>5/20/26</a:t>
             </a:fld>
             <a:endParaRPr lang="en-US"/>
           </a:p>
@@ -569,7 +574,7 @@
           <a:p>
             <a:fld id="{67F45AC6-C491-4585-A584-9CE2AF7D5500}" type="datetime1">
               <a:rPr lang="en-US" smtClean="0"/>
-              <a:t>5/19/26</a:t>
+              <a:t>5/20/26</a:t>
             </a:fld>
             <a:endParaRPr lang="en-US"/>
           </a:p>
@@ -1065,7 +1070,7 @@
               <a:tabLst/>
               <a:defRPr/>
             </a:pPr>
-            <a:endParaRPr kumimoji="0" lang="en-US" sz="1800" b="0" i="0" u="none" strike="noStrike" kern="1200" cap="none" spc="0" normalizeH="0" baseline="0" noProof="0">
+            <a:endParaRPr kumimoji="0" lang="es-ES_tradnl" sz="1800" b="0" i="0" u="none" strike="noStrike" kern="1200" cap="none" spc="0" normalizeH="0" baseline="0" noProof="0" dirty="0">
               <a:ln>
                 <a:noFill/>
               </a:ln>
@@ -1210,7 +1215,7 @@
               <a:tabLst/>
               <a:defRPr/>
             </a:pPr>
-            <a:endParaRPr kumimoji="0" lang="en-US" sz="1800" b="0" i="0" u="none" strike="noStrike" kern="1200" cap="none" spc="0" normalizeH="0" baseline="0" noProof="0">
+            <a:endParaRPr kumimoji="0" lang="es-ES_tradnl" sz="1800" b="0" i="0" u="none" strike="noStrike" kern="1200" cap="none" spc="0" normalizeH="0" baseline="0" noProof="0" dirty="0">
               <a:ln>
                 <a:noFill/>
               </a:ln>
@@ -1257,7 +1262,7 @@
           <a:p>
             <a:pPr algn="l"/>
             <a:r>
-              <a:rPr lang="es-ES_tradnl" sz="5800" dirty="0"/>
+              <a:rPr lang="es-ES_tradnl" sz="5800" noProof="0" dirty="0"/>
               <a:t>Interpolación</a:t>
             </a:r>
           </a:p>
@@ -1293,14 +1298,14 @@
           <a:p>
             <a:pPr algn="l"/>
             <a:r>
-              <a:rPr lang="es-ES_tradnl" sz="2200" dirty="0"/>
+              <a:rPr lang="es-ES_tradnl" sz="2200" noProof="0" dirty="0"/>
               <a:t>Programación científica</a:t>
             </a:r>
           </a:p>
           <a:p>
             <a:pPr algn="l"/>
             <a:r>
-              <a:rPr lang="es-ES_tradnl" sz="2200" dirty="0">
+              <a:rPr lang="es-ES_tradnl" sz="2200" noProof="0" dirty="0">
                 <a:solidFill>
                   <a:srgbClr val="00B0F0"/>
                 </a:solidFill>
@@ -1311,7 +1316,7 @@
           <a:p>
             <a:pPr algn="l"/>
             <a:r>
-              <a:rPr lang="es-ES_tradnl" sz="2200" dirty="0"/>
+              <a:rPr lang="es-ES_tradnl" sz="2200" noProof="0" dirty="0"/>
               <a:t>20 de Mayo 2026</a:t>
             </a:r>
           </a:p>
@@ -1369,7 +1374,7 @@
           <a:lstStyle/>
           <a:p>
             <a:r>
-              <a:rPr lang="es-ES_tradnl" dirty="0"/>
+              <a:rPr lang="es-ES_tradnl" noProof="0" dirty="0"/>
               <a:t>El problema de la interpolación</a:t>
             </a:r>
           </a:p>
@@ -1407,7 +1412,7 @@
               <a:buNone/>
             </a:pPr>
             <a:r>
-              <a:rPr lang="es-ES_tradnl" dirty="0">
+              <a:rPr lang="es-ES_tradnl" noProof="0" dirty="0">
                 <a:solidFill>
                   <a:schemeClr val="tx1">
                     <a:lumMod val="50000"/>
@@ -1502,7 +1507,7 @@
           <a:lstStyle/>
           <a:p>
             <a:r>
-              <a:rPr lang="es-ES_tradnl" dirty="0"/>
+              <a:rPr lang="es-ES_tradnl" noProof="0" dirty="0"/>
               <a:t>¿Para qué?</a:t>
             </a:r>
           </a:p>
@@ -1572,7 +1577,7 @@
               <a:tabLst/>
             </a:pPr>
             <a:r>
-              <a:rPr kumimoji="0" lang="en-CO" altLang="en-CO" sz="2800" b="0" i="0" u="none" strike="noStrike" cap="none" normalizeH="0" baseline="0" dirty="0">
+              <a:rPr kumimoji="0" lang="es-ES_tradnl" sz="2800" b="0" i="0" u="none" strike="noStrike" cap="none" normalizeH="0" baseline="0" noProof="0" dirty="0">
                 <a:ln>
                   <a:noFill/>
                 </a:ln>
@@ -1606,7 +1611,7 @@
               <a:tabLst/>
             </a:pPr>
             <a:r>
-              <a:rPr kumimoji="0" lang="en-CO" altLang="en-CO" sz="2800" b="0" i="0" u="none" strike="noStrike" cap="none" normalizeH="0" baseline="0" dirty="0">
+              <a:rPr kumimoji="0" lang="es-ES_tradnl" sz="2800" b="0" i="0" u="none" strike="noStrike" cap="none" normalizeH="0" baseline="0" noProof="0" dirty="0">
                 <a:ln>
                   <a:noFill/>
                 </a:ln>
@@ -1640,7 +1645,7 @@
               <a:tabLst/>
             </a:pPr>
             <a:r>
-              <a:rPr kumimoji="0" lang="en-CO" altLang="en-CO" sz="2800" b="0" i="0" u="none" strike="noStrike" cap="none" normalizeH="0" baseline="0" dirty="0">
+              <a:rPr kumimoji="0" lang="es-ES_tradnl" sz="2800" b="0" i="0" u="none" strike="noStrike" cap="none" normalizeH="0" baseline="0" noProof="0" dirty="0">
                 <a:ln>
                   <a:noFill/>
                 </a:ln>
@@ -1674,7 +1679,7 @@
               <a:tabLst/>
             </a:pPr>
             <a:r>
-              <a:rPr kumimoji="0" lang="en-CO" altLang="en-CO" sz="2800" b="0" i="0" u="none" strike="noStrike" cap="none" normalizeH="0" baseline="0" dirty="0">
+              <a:rPr kumimoji="0" lang="es-ES_tradnl" sz="2800" b="0" i="0" u="none" strike="noStrike" cap="none" normalizeH="0" baseline="0" noProof="0" dirty="0">
                 <a:ln>
                   <a:noFill/>
                 </a:ln>
@@ -1708,7 +1713,7 @@
               <a:tabLst/>
             </a:pPr>
             <a:r>
-              <a:rPr kumimoji="0" lang="en-CO" altLang="en-CO" sz="2800" b="0" i="0" u="none" strike="noStrike" cap="none" normalizeH="0" baseline="0" dirty="0">
+              <a:rPr kumimoji="0" lang="es-ES_tradnl" sz="2800" b="0" i="0" u="none" strike="noStrike" cap="none" normalizeH="0" baseline="0" noProof="0" dirty="0">
                 <a:ln>
                   <a:noFill/>
                 </a:ln>
@@ -1774,7 +1779,7 @@
           </a:lstStyle>
           <a:p>
             <a:r>
-              <a:rPr lang="es-ES_tradnl" dirty="0"/>
+              <a:rPr lang="es-ES_tradnl" noProof="0" dirty="0"/>
               <a:t>Idea más básica … </a:t>
             </a:r>
           </a:p>
@@ -1832,7 +1837,7 @@
           <a:lstStyle/>
           <a:p>
             <a:r>
-              <a:rPr lang="es-ES_tradnl" dirty="0"/>
+              <a:rPr lang="es-ES_tradnl" noProof="0" dirty="0"/>
               <a:t>Dos teoremas fundamentales </a:t>
             </a:r>
           </a:p>
@@ -1882,7 +1887,7 @@
               <a:buNone/>
             </a:pPr>
             <a:r>
-              <a:rPr lang="es-ES_tradnl" sz="2800" dirty="0">
+              <a:rPr lang="es-ES_tradnl" sz="2800" noProof="0" dirty="0">
                 <a:solidFill>
                   <a:schemeClr val="accent3"/>
                 </a:solidFill>
@@ -1895,194 +1900,14 @@
               <a:buNone/>
             </a:pPr>
             <a:r>
-              <a:rPr lang="en-US" dirty="0">
+              <a:rPr lang="es-ES_tradnl" noProof="0" dirty="0">
                 <a:solidFill>
                   <a:schemeClr val="bg1">
                     <a:lumMod val="50000"/>
                   </a:schemeClr>
                 </a:solidFill>
               </a:rPr>
-              <a:t>Un </a:t>
-            </a:r>
-            <a:r>
-              <a:rPr lang="en-US" dirty="0" err="1">
-                <a:solidFill>
-                  <a:schemeClr val="bg1">
-                    <a:lumMod val="50000"/>
-                  </a:schemeClr>
-                </a:solidFill>
-              </a:rPr>
-              <a:t>polinomio</a:t>
-            </a:r>
-            <a:r>
-              <a:rPr lang="en-US" dirty="0">
-                <a:solidFill>
-                  <a:schemeClr val="bg1">
-                    <a:lumMod val="50000"/>
-                  </a:schemeClr>
-                </a:solidFill>
-              </a:rPr>
-              <a:t> de </a:t>
-            </a:r>
-            <a:r>
-              <a:rPr lang="en-US" dirty="0" err="1">
-                <a:solidFill>
-                  <a:schemeClr val="bg1">
-                    <a:lumMod val="50000"/>
-                  </a:schemeClr>
-                </a:solidFill>
-              </a:rPr>
-              <a:t>grado</a:t>
-            </a:r>
-            <a:r>
-              <a:rPr lang="en-US" dirty="0">
-                <a:solidFill>
-                  <a:schemeClr val="bg1">
-                    <a:lumMod val="50000"/>
-                  </a:schemeClr>
-                </a:solidFill>
-              </a:rPr>
-              <a:t> n </a:t>
-            </a:r>
-            <a:r>
-              <a:rPr lang="en-US" dirty="0" err="1">
-                <a:solidFill>
-                  <a:schemeClr val="bg1">
-                    <a:lumMod val="50000"/>
-                  </a:schemeClr>
-                </a:solidFill>
-              </a:rPr>
-              <a:t>tiene</a:t>
-            </a:r>
-            <a:r>
-              <a:rPr lang="en-US" dirty="0">
-                <a:solidFill>
-                  <a:schemeClr val="bg1">
-                    <a:lumMod val="50000"/>
-                  </a:schemeClr>
-                </a:solidFill>
-              </a:rPr>
-              <a:t> </a:t>
-            </a:r>
-            <a:r>
-              <a:rPr lang="en-US" dirty="0" err="1">
-                <a:solidFill>
-                  <a:schemeClr val="bg1">
-                    <a:lumMod val="50000"/>
-                  </a:schemeClr>
-                </a:solidFill>
-              </a:rPr>
-              <a:t>exactamente</a:t>
-            </a:r>
-            <a:r>
-              <a:rPr lang="en-US" dirty="0">
-                <a:solidFill>
-                  <a:schemeClr val="bg1">
-                    <a:lumMod val="50000"/>
-                  </a:schemeClr>
-                </a:solidFill>
-              </a:rPr>
-              <a:t> n </a:t>
-            </a:r>
-            <a:r>
-              <a:rPr lang="en-US" dirty="0" err="1">
-                <a:solidFill>
-                  <a:schemeClr val="bg1">
-                    <a:lumMod val="50000"/>
-                  </a:schemeClr>
-                </a:solidFill>
-              </a:rPr>
-              <a:t>raíces</a:t>
-            </a:r>
-            <a:r>
-              <a:rPr lang="en-US" dirty="0">
-                <a:solidFill>
-                  <a:schemeClr val="bg1">
-                    <a:lumMod val="50000"/>
-                  </a:schemeClr>
-                </a:solidFill>
-              </a:rPr>
-              <a:t> (</a:t>
-            </a:r>
-            <a:r>
-              <a:rPr lang="en-US" dirty="0" err="1">
-                <a:solidFill>
-                  <a:schemeClr val="bg1">
-                    <a:lumMod val="50000"/>
-                  </a:schemeClr>
-                </a:solidFill>
-              </a:rPr>
-              <a:t>que</a:t>
-            </a:r>
-            <a:r>
-              <a:rPr lang="en-US" dirty="0">
-                <a:solidFill>
-                  <a:schemeClr val="bg1">
-                    <a:lumMod val="50000"/>
-                  </a:schemeClr>
-                </a:solidFill>
-              </a:rPr>
-              <a:t> </a:t>
-            </a:r>
-            <a:r>
-              <a:rPr lang="en-US" dirty="0" err="1">
-                <a:solidFill>
-                  <a:schemeClr val="bg1">
-                    <a:lumMod val="50000"/>
-                  </a:schemeClr>
-                </a:solidFill>
-              </a:rPr>
-              <a:t>pueden</a:t>
-            </a:r>
-            <a:r>
-              <a:rPr lang="en-US" dirty="0">
-                <a:solidFill>
-                  <a:schemeClr val="bg1">
-                    <a:lumMod val="50000"/>
-                  </a:schemeClr>
-                </a:solidFill>
-              </a:rPr>
-              <a:t> ser </a:t>
-            </a:r>
-            <a:r>
-              <a:rPr lang="en-US" dirty="0" err="1">
-                <a:solidFill>
-                  <a:schemeClr val="bg1">
-                    <a:lumMod val="50000"/>
-                  </a:schemeClr>
-                </a:solidFill>
-              </a:rPr>
-              <a:t>reales</a:t>
-            </a:r>
-            <a:r>
-              <a:rPr lang="en-US" dirty="0">
-                <a:solidFill>
-                  <a:schemeClr val="bg1">
-                    <a:lumMod val="50000"/>
-                  </a:schemeClr>
-                </a:solidFill>
-              </a:rPr>
-              <a:t> o </a:t>
-            </a:r>
-            <a:r>
-              <a:rPr lang="en-US" dirty="0" err="1">
-                <a:solidFill>
-                  <a:schemeClr val="bg1">
-                    <a:lumMod val="50000"/>
-                  </a:schemeClr>
-                </a:solidFill>
-              </a:rPr>
-              <a:t>imaginarias</a:t>
-            </a:r>
-            <a:r>
-              <a:rPr lang="en-US" dirty="0">
-                <a:solidFill>
-                  <a:schemeClr val="bg1">
-                    <a:lumMod val="50000"/>
-                  </a:schemeClr>
-                </a:solidFill>
-              </a:rPr>
-              <a:t>).</a:t>
+              <a:t>Un polinomio de grado n tiene exactamente n raíces (que pueden ser reales o imaginarias).</a:t>
             </a:r>
           </a:p>
         </p:txBody>
@@ -2298,46 +2123,14 @@
               <a:buNone/>
             </a:pPr>
             <a:r>
-              <a:rPr lang="en-US" sz="2400" dirty="0" err="1">
+              <a:rPr lang="es-ES_tradnl" sz="2400" noProof="0" dirty="0">
                 <a:solidFill>
                   <a:schemeClr val="accent1"/>
                 </a:solidFill>
               </a:rPr>
-              <a:t>Teorema</a:t>
-            </a:r>
-            <a:r>
-              <a:rPr lang="en-US" sz="2400" dirty="0">
-                <a:solidFill>
-                  <a:schemeClr val="accent1"/>
-                </a:solidFill>
-              </a:rPr>
-              <a:t> de </a:t>
-            </a:r>
-            <a:r>
-              <a:rPr lang="en-US" sz="2400" dirty="0" err="1">
-                <a:solidFill>
-                  <a:schemeClr val="accent1"/>
-                </a:solidFill>
-              </a:rPr>
-              <a:t>aproximación</a:t>
-            </a:r>
-            <a:r>
-              <a:rPr lang="en-US" sz="2400" dirty="0">
-                <a:solidFill>
-                  <a:schemeClr val="accent1"/>
-                </a:solidFill>
-              </a:rPr>
-              <a:t> de </a:t>
-            </a:r>
-            <a:r>
-              <a:rPr lang="en-US" sz="2400" dirty="0" err="1">
-                <a:solidFill>
-                  <a:schemeClr val="accent1"/>
-                </a:solidFill>
-              </a:rPr>
-              <a:t>Weierstrass</a:t>
-            </a:r>
-            <a:endParaRPr lang="es-ES_tradnl" dirty="0">
+              <a:t>Teorema de aproximación de Weierstrass</a:t>
+            </a:r>
+            <a:endParaRPr lang="es-ES_tradnl" noProof="0" dirty="0">
               <a:solidFill>
                 <a:schemeClr val="accent1"/>
               </a:solidFill>
@@ -2349,7 +2142,7 @@
               <a:buNone/>
             </a:pPr>
             <a:br>
-              <a:rPr lang="en-US" dirty="0">
+              <a:rPr lang="es-ES_tradnl" noProof="0" dirty="0">
                 <a:solidFill>
                   <a:schemeClr val="bg1">
                     <a:lumMod val="50000"/>
@@ -2358,192 +2151,15 @@
               </a:rPr>
             </a:br>
             <a:r>
-              <a:rPr lang="en-US" dirty="0">
+              <a:rPr lang="es-ES_tradnl" noProof="0" dirty="0">
                 <a:solidFill>
                   <a:schemeClr val="bg1">
                     <a:lumMod val="50000"/>
                   </a:schemeClr>
                 </a:solidFill>
               </a:rPr>
-              <a:t>Cualquier </a:t>
-            </a:r>
-            <a:r>
-              <a:rPr lang="en-US" dirty="0" err="1">
-                <a:solidFill>
-                  <a:schemeClr val="bg1">
-                    <a:lumMod val="50000"/>
-                  </a:schemeClr>
-                </a:solidFill>
-              </a:rPr>
-              <a:t>función</a:t>
-            </a:r>
-            <a:r>
-              <a:rPr lang="en-US" dirty="0">
-                <a:solidFill>
-                  <a:schemeClr val="bg1">
-                    <a:lumMod val="50000"/>
-                  </a:schemeClr>
-                </a:solidFill>
-              </a:rPr>
-              <a:t> continua </a:t>
-            </a:r>
-            <a:r>
-              <a:rPr lang="en-US" dirty="0" err="1">
-                <a:solidFill>
-                  <a:schemeClr val="bg1">
-                    <a:lumMod val="50000"/>
-                  </a:schemeClr>
-                </a:solidFill>
-              </a:rPr>
-              <a:t>en</a:t>
-            </a:r>
-            <a:r>
-              <a:rPr lang="en-US" dirty="0">
-                <a:solidFill>
-                  <a:schemeClr val="bg1">
-                    <a:lumMod val="50000"/>
-                  </a:schemeClr>
-                </a:solidFill>
-              </a:rPr>
-              <a:t> un </a:t>
-            </a:r>
-            <a:r>
-              <a:rPr lang="en-US" dirty="0" err="1">
-                <a:solidFill>
-                  <a:schemeClr val="bg1">
-                    <a:lumMod val="50000"/>
-                  </a:schemeClr>
-                </a:solidFill>
-              </a:rPr>
-              <a:t>intervalo</a:t>
-            </a:r>
-            <a:r>
-              <a:rPr lang="en-US" dirty="0">
-                <a:solidFill>
-                  <a:schemeClr val="bg1">
-                    <a:lumMod val="50000"/>
-                  </a:schemeClr>
-                </a:solidFill>
-              </a:rPr>
-              <a:t> </a:t>
-            </a:r>
-            <a:r>
-              <a:rPr lang="en-US" dirty="0" err="1">
-                <a:solidFill>
-                  <a:schemeClr val="bg1">
-                    <a:lumMod val="50000"/>
-                  </a:schemeClr>
-                </a:solidFill>
-              </a:rPr>
-              <a:t>cerrado</a:t>
-            </a:r>
-            <a:r>
-              <a:rPr lang="en-US" dirty="0">
-                <a:solidFill>
-                  <a:schemeClr val="bg1">
-                    <a:lumMod val="50000"/>
-                  </a:schemeClr>
-                </a:solidFill>
-              </a:rPr>
-              <a:t> y </a:t>
-            </a:r>
-            <a:r>
-              <a:rPr lang="en-US" dirty="0" err="1">
-                <a:solidFill>
-                  <a:schemeClr val="bg1">
-                    <a:lumMod val="50000"/>
-                  </a:schemeClr>
-                </a:solidFill>
-              </a:rPr>
-              <a:t>puede</a:t>
-            </a:r>
-            <a:r>
-              <a:rPr lang="en-US" dirty="0">
-                <a:solidFill>
-                  <a:schemeClr val="bg1">
-                    <a:lumMod val="50000"/>
-                  </a:schemeClr>
-                </a:solidFill>
-              </a:rPr>
-              <a:t> ser </a:t>
-            </a:r>
-            <a:r>
-              <a:rPr lang="en-US" dirty="0" err="1">
-                <a:solidFill>
-                  <a:schemeClr val="bg1">
-                    <a:lumMod val="50000"/>
-                  </a:schemeClr>
-                </a:solidFill>
-              </a:rPr>
-              <a:t>aproximada</a:t>
-            </a:r>
-            <a:r>
-              <a:rPr lang="en-US" dirty="0">
-                <a:solidFill>
-                  <a:schemeClr val="bg1">
-                    <a:lumMod val="50000"/>
-                  </a:schemeClr>
-                </a:solidFill>
-              </a:rPr>
-              <a:t> </a:t>
-            </a:r>
-            <a:r>
-              <a:rPr lang="en-US" dirty="0" err="1">
-                <a:solidFill>
-                  <a:schemeClr val="bg1">
-                    <a:lumMod val="50000"/>
-                  </a:schemeClr>
-                </a:solidFill>
-              </a:rPr>
-              <a:t>uniformemente</a:t>
-            </a:r>
-            <a:r>
-              <a:rPr lang="en-US" dirty="0">
-                <a:solidFill>
-                  <a:schemeClr val="bg1">
-                    <a:lumMod val="50000"/>
-                  </a:schemeClr>
-                </a:solidFill>
-              </a:rPr>
-              <a:t> </a:t>
-            </a:r>
-            <a:r>
-              <a:rPr lang="en-US" dirty="0" err="1">
-                <a:solidFill>
-                  <a:schemeClr val="bg1">
-                    <a:lumMod val="50000"/>
-                  </a:schemeClr>
-                </a:solidFill>
-              </a:rPr>
-              <a:t>mediante</a:t>
-            </a:r>
-            <a:r>
-              <a:rPr lang="en-US" dirty="0">
-                <a:solidFill>
-                  <a:schemeClr val="bg1">
-                    <a:lumMod val="50000"/>
-                  </a:schemeClr>
-                </a:solidFill>
-              </a:rPr>
-              <a:t> </a:t>
-            </a:r>
-            <a:r>
-              <a:rPr lang="en-US" dirty="0" err="1">
-                <a:solidFill>
-                  <a:schemeClr val="bg1">
-                    <a:lumMod val="50000"/>
-                  </a:schemeClr>
-                </a:solidFill>
-              </a:rPr>
-              <a:t>polinomios</a:t>
-            </a:r>
-            <a:endParaRPr lang="es-ES_tradnl" dirty="0">
-              <a:solidFill>
-                <a:schemeClr val="bg1">
-                  <a:lumMod val="50000"/>
-                </a:schemeClr>
-              </a:solidFill>
-            </a:endParaRPr>
+              <a:t>Cualquier función continua en un intervalo cerrado y puede ser aproximada uniformemente mediante polinomios</a:t>
+            </a:r>
           </a:p>
         </p:txBody>
       </p:sp>
@@ -2640,7 +2256,7 @@
           <a:lstStyle/>
           <a:p>
             <a:r>
-              <a:rPr lang="es-ES_tradnl" dirty="0"/>
+              <a:rPr lang="es-ES_tradnl" noProof="0" dirty="0"/>
               <a:t>Polinomios de Lagrange</a:t>
             </a:r>
           </a:p>
@@ -2728,7 +2344,7 @@
           <a:lstStyle/>
           <a:p>
             <a:r>
-              <a:rPr lang="es-ES_tradnl" dirty="0"/>
+              <a:rPr lang="es-ES_tradnl" noProof="0" dirty="0"/>
               <a:t>Unicidad y error</a:t>
             </a:r>
           </a:p>
@@ -2776,7 +2392,7 @@
           <a:lstStyle/>
           <a:p>
             <a:r>
-              <a:rPr lang="en-US" sz="2400" dirty="0">
+              <a:rPr lang="es-ES_tradnl" sz="2400" noProof="0" dirty="0">
                 <a:solidFill>
                   <a:schemeClr val="tx1">
                     <a:lumMod val="65000"/>
@@ -2786,434 +2402,8 @@
                 <a:latin typeface="Arial" panose="020B0604020202020204" pitchFamily="34" charset="0"/>
                 <a:cs typeface="Arial" panose="020B0604020202020204" pitchFamily="34" charset="0"/>
               </a:rPr>
-              <a:t>Hay </a:t>
-            </a:r>
-            <a:r>
-              <a:rPr lang="en-US" sz="2400" dirty="0" err="1">
-                <a:solidFill>
-                  <a:schemeClr val="tx1">
-                    <a:lumMod val="65000"/>
-                    <a:lumOff val="35000"/>
-                  </a:schemeClr>
-                </a:solidFill>
-                <a:latin typeface="Arial" panose="020B0604020202020204" pitchFamily="34" charset="0"/>
-                <a:cs typeface="Arial" panose="020B0604020202020204" pitchFamily="34" charset="0"/>
-              </a:rPr>
-              <a:t>muchas</a:t>
-            </a:r>
-            <a:r>
-              <a:rPr lang="en-US" sz="2400" dirty="0">
-                <a:solidFill>
-                  <a:schemeClr val="tx1">
-                    <a:lumMod val="65000"/>
-                    <a:lumOff val="35000"/>
-                  </a:schemeClr>
-                </a:solidFill>
-                <a:latin typeface="Arial" panose="020B0604020202020204" pitchFamily="34" charset="0"/>
-                <a:cs typeface="Arial" panose="020B0604020202020204" pitchFamily="34" charset="0"/>
-              </a:rPr>
-              <a:t> </a:t>
-            </a:r>
-            <a:r>
-              <a:rPr lang="en-US" sz="2400" dirty="0" err="1">
-                <a:solidFill>
-                  <a:schemeClr val="tx1">
-                    <a:lumMod val="65000"/>
-                    <a:lumOff val="35000"/>
-                  </a:schemeClr>
-                </a:solidFill>
-                <a:latin typeface="Arial" panose="020B0604020202020204" pitchFamily="34" charset="0"/>
-                <a:cs typeface="Arial" panose="020B0604020202020204" pitchFamily="34" charset="0"/>
-              </a:rPr>
-              <a:t>formas</a:t>
-            </a:r>
-            <a:r>
-              <a:rPr lang="en-US" sz="2400" dirty="0">
-                <a:solidFill>
-                  <a:schemeClr val="tx1">
-                    <a:lumMod val="65000"/>
-                    <a:lumOff val="35000"/>
-                  </a:schemeClr>
-                </a:solidFill>
-                <a:latin typeface="Arial" panose="020B0604020202020204" pitchFamily="34" charset="0"/>
-                <a:cs typeface="Arial" panose="020B0604020202020204" pitchFamily="34" charset="0"/>
-              </a:rPr>
-              <a:t> de </a:t>
-            </a:r>
-            <a:r>
-              <a:rPr lang="en-US" sz="2400" dirty="0" err="1">
-                <a:solidFill>
-                  <a:schemeClr val="tx1">
-                    <a:lumMod val="65000"/>
-                    <a:lumOff val="35000"/>
-                  </a:schemeClr>
-                </a:solidFill>
-                <a:latin typeface="Arial" panose="020B0604020202020204" pitchFamily="34" charset="0"/>
-                <a:cs typeface="Arial" panose="020B0604020202020204" pitchFamily="34" charset="0"/>
-              </a:rPr>
-              <a:t>representar</a:t>
-            </a:r>
-            <a:r>
-              <a:rPr lang="en-US" sz="2400" dirty="0">
-                <a:solidFill>
-                  <a:schemeClr val="tx1">
-                    <a:lumMod val="65000"/>
-                    <a:lumOff val="35000"/>
-                  </a:schemeClr>
-                </a:solidFill>
-                <a:latin typeface="Arial" panose="020B0604020202020204" pitchFamily="34" charset="0"/>
-                <a:cs typeface="Arial" panose="020B0604020202020204" pitchFamily="34" charset="0"/>
-              </a:rPr>
-              <a:t> o </a:t>
-            </a:r>
-            <a:r>
-              <a:rPr lang="en-US" sz="2400" dirty="0" err="1">
-                <a:solidFill>
-                  <a:schemeClr val="tx1">
-                    <a:lumMod val="65000"/>
-                    <a:lumOff val="35000"/>
-                  </a:schemeClr>
-                </a:solidFill>
-                <a:latin typeface="Arial" panose="020B0604020202020204" pitchFamily="34" charset="0"/>
-                <a:cs typeface="Arial" panose="020B0604020202020204" pitchFamily="34" charset="0"/>
-              </a:rPr>
-              <a:t>calcular</a:t>
-            </a:r>
-            <a:r>
-              <a:rPr lang="en-US" sz="2400" dirty="0">
-                <a:solidFill>
-                  <a:schemeClr val="tx1">
-                    <a:lumMod val="65000"/>
-                    <a:lumOff val="35000"/>
-                  </a:schemeClr>
-                </a:solidFill>
-                <a:latin typeface="Arial" panose="020B0604020202020204" pitchFamily="34" charset="0"/>
-                <a:cs typeface="Arial" panose="020B0604020202020204" pitchFamily="34" charset="0"/>
-              </a:rPr>
-              <a:t> </a:t>
-            </a:r>
-            <a:r>
-              <a:rPr lang="en-US" sz="2400" dirty="0" err="1">
-                <a:solidFill>
-                  <a:schemeClr val="tx1">
-                    <a:lumMod val="65000"/>
-                    <a:lumOff val="35000"/>
-                  </a:schemeClr>
-                </a:solidFill>
-                <a:latin typeface="Arial" panose="020B0604020202020204" pitchFamily="34" charset="0"/>
-                <a:cs typeface="Arial" panose="020B0604020202020204" pitchFamily="34" charset="0"/>
-              </a:rPr>
-              <a:t>el</a:t>
-            </a:r>
-            <a:r>
-              <a:rPr lang="en-US" sz="2400" dirty="0">
-                <a:solidFill>
-                  <a:schemeClr val="tx1">
-                    <a:lumMod val="65000"/>
-                    <a:lumOff val="35000"/>
-                  </a:schemeClr>
-                </a:solidFill>
-                <a:latin typeface="Arial" panose="020B0604020202020204" pitchFamily="34" charset="0"/>
-                <a:cs typeface="Arial" panose="020B0604020202020204" pitchFamily="34" charset="0"/>
-              </a:rPr>
-              <a:t> </a:t>
-            </a:r>
-            <a:r>
-              <a:rPr lang="en-US" sz="2400" dirty="0" err="1">
-                <a:solidFill>
-                  <a:schemeClr val="tx1">
-                    <a:lumMod val="65000"/>
-                    <a:lumOff val="35000"/>
-                  </a:schemeClr>
-                </a:solidFill>
-                <a:latin typeface="Arial" panose="020B0604020202020204" pitchFamily="34" charset="0"/>
-                <a:cs typeface="Arial" panose="020B0604020202020204" pitchFamily="34" charset="0"/>
-              </a:rPr>
-              <a:t>polinomio</a:t>
-            </a:r>
-            <a:r>
-              <a:rPr lang="en-US" sz="2400" dirty="0">
-                <a:solidFill>
-                  <a:schemeClr val="tx1">
-                    <a:lumMod val="65000"/>
-                    <a:lumOff val="35000"/>
-                  </a:schemeClr>
-                </a:solidFill>
-                <a:latin typeface="Arial" panose="020B0604020202020204" pitchFamily="34" charset="0"/>
-                <a:cs typeface="Arial" panose="020B0604020202020204" pitchFamily="34" charset="0"/>
-              </a:rPr>
-              <a:t> </a:t>
-            </a:r>
-            <a:r>
-              <a:rPr lang="en-US" sz="2400" dirty="0" err="1">
-                <a:solidFill>
-                  <a:schemeClr val="tx1">
-                    <a:lumMod val="65000"/>
-                    <a:lumOff val="35000"/>
-                  </a:schemeClr>
-                </a:solidFill>
-                <a:latin typeface="Arial" panose="020B0604020202020204" pitchFamily="34" charset="0"/>
-                <a:cs typeface="Arial" panose="020B0604020202020204" pitchFamily="34" charset="0"/>
-              </a:rPr>
-              <a:t>interpolador</a:t>
-            </a:r>
-            <a:r>
-              <a:rPr lang="en-US" sz="2400" dirty="0">
-                <a:solidFill>
-                  <a:schemeClr val="tx1">
-                    <a:lumMod val="65000"/>
-                    <a:lumOff val="35000"/>
-                  </a:schemeClr>
-                </a:solidFill>
-                <a:latin typeface="Arial" panose="020B0604020202020204" pitchFamily="34" charset="0"/>
-                <a:cs typeface="Arial" panose="020B0604020202020204" pitchFamily="34" charset="0"/>
-              </a:rPr>
-              <a:t>, </a:t>
-            </a:r>
-            <a:r>
-              <a:rPr lang="en-US" sz="2400" dirty="0" err="1">
-                <a:solidFill>
-                  <a:schemeClr val="tx1">
-                    <a:lumMod val="65000"/>
-                    <a:lumOff val="35000"/>
-                  </a:schemeClr>
-                </a:solidFill>
-                <a:latin typeface="Arial" panose="020B0604020202020204" pitchFamily="34" charset="0"/>
-                <a:cs typeface="Arial" panose="020B0604020202020204" pitchFamily="34" charset="0"/>
-              </a:rPr>
-              <a:t>pero</a:t>
-            </a:r>
-            <a:r>
-              <a:rPr lang="en-US" sz="2400" dirty="0">
-                <a:solidFill>
-                  <a:schemeClr val="tx1">
-                    <a:lumMod val="65000"/>
-                    <a:lumOff val="35000"/>
-                  </a:schemeClr>
-                </a:solidFill>
-                <a:latin typeface="Arial" panose="020B0604020202020204" pitchFamily="34" charset="0"/>
-                <a:cs typeface="Arial" panose="020B0604020202020204" pitchFamily="34" charset="0"/>
-              </a:rPr>
-              <a:t> </a:t>
-            </a:r>
-            <a:r>
-              <a:rPr lang="en-US" sz="2400" dirty="0" err="1">
-                <a:solidFill>
-                  <a:schemeClr val="tx1">
-                    <a:lumMod val="65000"/>
-                    <a:lumOff val="35000"/>
-                  </a:schemeClr>
-                </a:solidFill>
-                <a:latin typeface="Arial" panose="020B0604020202020204" pitchFamily="34" charset="0"/>
-                <a:cs typeface="Arial" panose="020B0604020202020204" pitchFamily="34" charset="0"/>
-              </a:rPr>
-              <a:t>en</a:t>
-            </a:r>
-            <a:r>
-              <a:rPr lang="en-US" sz="2400" dirty="0">
-                <a:solidFill>
-                  <a:schemeClr val="tx1">
-                    <a:lumMod val="65000"/>
-                    <a:lumOff val="35000"/>
-                  </a:schemeClr>
-                </a:solidFill>
-                <a:latin typeface="Arial" panose="020B0604020202020204" pitchFamily="34" charset="0"/>
-                <a:cs typeface="Arial" panose="020B0604020202020204" pitchFamily="34" charset="0"/>
-              </a:rPr>
-              <a:t> </a:t>
-            </a:r>
-            <a:r>
-              <a:rPr lang="en-US" sz="2400" dirty="0" err="1">
-                <a:solidFill>
-                  <a:schemeClr val="tx1">
-                    <a:lumMod val="65000"/>
-                    <a:lumOff val="35000"/>
-                  </a:schemeClr>
-                </a:solidFill>
-                <a:latin typeface="Arial" panose="020B0604020202020204" pitchFamily="34" charset="0"/>
-                <a:cs typeface="Arial" panose="020B0604020202020204" pitchFamily="34" charset="0"/>
-              </a:rPr>
-              <a:t>teoría</a:t>
-            </a:r>
-            <a:r>
-              <a:rPr lang="en-US" sz="2400" dirty="0">
-                <a:solidFill>
-                  <a:schemeClr val="tx1">
-                    <a:lumMod val="65000"/>
-                    <a:lumOff val="35000"/>
-                  </a:schemeClr>
-                </a:solidFill>
-                <a:latin typeface="Arial" panose="020B0604020202020204" pitchFamily="34" charset="0"/>
-                <a:cs typeface="Arial" panose="020B0604020202020204" pitchFamily="34" charset="0"/>
-              </a:rPr>
-              <a:t> </a:t>
-            </a:r>
-            <a:r>
-              <a:rPr lang="en-US" sz="2400" dirty="0" err="1">
-                <a:solidFill>
-                  <a:schemeClr val="tx1">
-                    <a:lumMod val="65000"/>
-                    <a:lumOff val="35000"/>
-                  </a:schemeClr>
-                </a:solidFill>
-                <a:latin typeface="Arial" panose="020B0604020202020204" pitchFamily="34" charset="0"/>
-                <a:cs typeface="Arial" panose="020B0604020202020204" pitchFamily="34" charset="0"/>
-              </a:rPr>
-              <a:t>todas</a:t>
-            </a:r>
-            <a:r>
-              <a:rPr lang="en-US" sz="2400" dirty="0">
-                <a:solidFill>
-                  <a:schemeClr val="tx1">
-                    <a:lumMod val="65000"/>
-                    <a:lumOff val="35000"/>
-                  </a:schemeClr>
-                </a:solidFill>
-                <a:latin typeface="Arial" panose="020B0604020202020204" pitchFamily="34" charset="0"/>
-                <a:cs typeface="Arial" panose="020B0604020202020204" pitchFamily="34" charset="0"/>
-              </a:rPr>
-              <a:t> </a:t>
-            </a:r>
-            <a:r>
-              <a:rPr lang="en-US" sz="2400" dirty="0" err="1">
-                <a:solidFill>
-                  <a:schemeClr val="tx1">
-                    <a:lumMod val="65000"/>
-                    <a:lumOff val="35000"/>
-                  </a:schemeClr>
-                </a:solidFill>
-                <a:latin typeface="Arial" panose="020B0604020202020204" pitchFamily="34" charset="0"/>
-                <a:cs typeface="Arial" panose="020B0604020202020204" pitchFamily="34" charset="0"/>
-              </a:rPr>
-              <a:t>deben</a:t>
-            </a:r>
-            <a:r>
-              <a:rPr lang="en-US" sz="2400" dirty="0">
-                <a:solidFill>
-                  <a:schemeClr val="tx1">
-                    <a:lumMod val="65000"/>
-                    <a:lumOff val="35000"/>
-                  </a:schemeClr>
-                </a:solidFill>
-                <a:latin typeface="Arial" panose="020B0604020202020204" pitchFamily="34" charset="0"/>
-                <a:cs typeface="Arial" panose="020B0604020202020204" pitchFamily="34" charset="0"/>
-              </a:rPr>
-              <a:t> </a:t>
-            </a:r>
-            <a:r>
-              <a:rPr lang="en-US" sz="2400" dirty="0" err="1">
-                <a:solidFill>
-                  <a:schemeClr val="tx1">
-                    <a:lumMod val="65000"/>
-                    <a:lumOff val="35000"/>
-                  </a:schemeClr>
-                </a:solidFill>
-                <a:latin typeface="Arial" panose="020B0604020202020204" pitchFamily="34" charset="0"/>
-                <a:cs typeface="Arial" panose="020B0604020202020204" pitchFamily="34" charset="0"/>
-              </a:rPr>
-              <a:t>dar</a:t>
-            </a:r>
-            <a:r>
-              <a:rPr lang="en-US" sz="2400" dirty="0">
-                <a:solidFill>
-                  <a:schemeClr val="tx1">
-                    <a:lumMod val="65000"/>
-                    <a:lumOff val="35000"/>
-                  </a:schemeClr>
-                </a:solidFill>
-                <a:latin typeface="Arial" panose="020B0604020202020204" pitchFamily="34" charset="0"/>
-                <a:cs typeface="Arial" panose="020B0604020202020204" pitchFamily="34" charset="0"/>
-              </a:rPr>
-              <a:t> </a:t>
-            </a:r>
-            <a:r>
-              <a:rPr lang="en-US" sz="2400" dirty="0" err="1">
-                <a:solidFill>
-                  <a:schemeClr val="tx1">
-                    <a:lumMod val="65000"/>
-                    <a:lumOff val="35000"/>
-                  </a:schemeClr>
-                </a:solidFill>
-                <a:latin typeface="Arial" panose="020B0604020202020204" pitchFamily="34" charset="0"/>
-                <a:cs typeface="Arial" panose="020B0604020202020204" pitchFamily="34" charset="0"/>
-              </a:rPr>
-              <a:t>el</a:t>
-            </a:r>
-            <a:r>
-              <a:rPr lang="en-US" sz="2400" dirty="0">
-                <a:solidFill>
-                  <a:schemeClr val="tx1">
-                    <a:lumMod val="65000"/>
-                    <a:lumOff val="35000"/>
-                  </a:schemeClr>
-                </a:solidFill>
-                <a:latin typeface="Arial" panose="020B0604020202020204" pitchFamily="34" charset="0"/>
-                <a:cs typeface="Arial" panose="020B0604020202020204" pitchFamily="34" charset="0"/>
-              </a:rPr>
-              <a:t> </a:t>
-            </a:r>
-            <a:r>
-              <a:rPr lang="en-US" sz="2400" dirty="0" err="1">
-                <a:solidFill>
-                  <a:schemeClr val="tx1">
-                    <a:lumMod val="65000"/>
-                    <a:lumOff val="35000"/>
-                  </a:schemeClr>
-                </a:solidFill>
-                <a:latin typeface="Arial" panose="020B0604020202020204" pitchFamily="34" charset="0"/>
-                <a:cs typeface="Arial" panose="020B0604020202020204" pitchFamily="34" charset="0"/>
-              </a:rPr>
-              <a:t>mismo</a:t>
-            </a:r>
-            <a:r>
-              <a:rPr lang="en-US" sz="2400" dirty="0">
-                <a:solidFill>
-                  <a:schemeClr val="tx1">
-                    <a:lumMod val="65000"/>
-                    <a:lumOff val="35000"/>
-                  </a:schemeClr>
-                </a:solidFill>
-                <a:latin typeface="Arial" panose="020B0604020202020204" pitchFamily="34" charset="0"/>
-                <a:cs typeface="Arial" panose="020B0604020202020204" pitchFamily="34" charset="0"/>
-              </a:rPr>
-              <a:t> </a:t>
-            </a:r>
-            <a:r>
-              <a:rPr lang="en-US" sz="2400" dirty="0" err="1">
-                <a:solidFill>
-                  <a:schemeClr val="tx1">
-                    <a:lumMod val="65000"/>
-                    <a:lumOff val="35000"/>
-                  </a:schemeClr>
-                </a:solidFill>
-                <a:latin typeface="Arial" panose="020B0604020202020204" pitchFamily="34" charset="0"/>
-                <a:cs typeface="Arial" panose="020B0604020202020204" pitchFamily="34" charset="0"/>
-              </a:rPr>
-              <a:t>resultado</a:t>
-            </a:r>
-            <a:r>
-              <a:rPr lang="en-US" sz="2400" dirty="0">
-                <a:solidFill>
-                  <a:schemeClr val="tx1">
-                    <a:lumMod val="65000"/>
-                    <a:lumOff val="35000"/>
-                  </a:schemeClr>
-                </a:solidFill>
-                <a:latin typeface="Arial" panose="020B0604020202020204" pitchFamily="34" charset="0"/>
-                <a:cs typeface="Arial" panose="020B0604020202020204" pitchFamily="34" charset="0"/>
-              </a:rPr>
-              <a:t>.</a:t>
-            </a:r>
-            <a:endParaRPr lang="es-ES_tradnl" sz="2400" dirty="0">
-              <a:solidFill>
-                <a:schemeClr val="tx1">
-                  <a:lumMod val="65000"/>
-                  <a:lumOff val="35000"/>
-                </a:schemeClr>
-              </a:solidFill>
-              <a:latin typeface="Arial" panose="020B0604020202020204" pitchFamily="34" charset="0"/>
-              <a:cs typeface="Arial" panose="020B0604020202020204" pitchFamily="34" charset="0"/>
-            </a:endParaRPr>
+              <a:t>Hay muchas formas de representar o calcular el polinomio interpolador, pero en teoría todas deben dar el mismo resultado.</a:t>
+            </a:r>
           </a:p>
         </p:txBody>
       </p:sp>
@@ -3246,7 +2436,7 @@
           <a:lstStyle/>
           <a:p>
             <a:r>
-              <a:rPr lang="es-ES_tradnl" sz="1400" dirty="0">
+              <a:rPr lang="es-ES_tradnl" sz="1400" noProof="0" dirty="0">
                 <a:solidFill>
                   <a:srgbClr val="0070C0"/>
                 </a:solidFill>
@@ -3256,7 +2446,7 @@
               <a:t>https://</a:t>
             </a:r>
             <a:r>
-              <a:rPr lang="es-ES_tradnl" sz="1400" dirty="0" err="1">
+              <a:rPr lang="es-ES_tradnl" sz="1400" noProof="0" dirty="0" err="1">
                 <a:solidFill>
                   <a:srgbClr val="0070C0"/>
                 </a:solidFill>
@@ -3266,7 +2456,7 @@
               <a:t>docs.scipy.org</a:t>
             </a:r>
             <a:r>
-              <a:rPr lang="es-ES_tradnl" sz="1400" dirty="0">
+              <a:rPr lang="es-ES_tradnl" sz="1400" noProof="0" dirty="0">
                 <a:solidFill>
                   <a:srgbClr val="0070C0"/>
                 </a:solidFill>
@@ -3276,7 +2466,7 @@
               <a:t>/</a:t>
             </a:r>
             <a:r>
-              <a:rPr lang="es-ES_tradnl" sz="1400" dirty="0" err="1">
+              <a:rPr lang="es-ES_tradnl" sz="1400" noProof="0" dirty="0" err="1">
                 <a:solidFill>
                   <a:srgbClr val="0070C0"/>
                 </a:solidFill>
@@ -3286,7 +2476,7 @@
               <a:t>doc</a:t>
             </a:r>
             <a:r>
-              <a:rPr lang="es-ES_tradnl" sz="1400" dirty="0">
+              <a:rPr lang="es-ES_tradnl" sz="1400" noProof="0" dirty="0">
                 <a:solidFill>
                   <a:srgbClr val="0070C0"/>
                 </a:solidFill>
@@ -3296,7 +2486,7 @@
               <a:t>/</a:t>
             </a:r>
             <a:r>
-              <a:rPr lang="es-ES_tradnl" sz="1400" dirty="0" err="1">
+              <a:rPr lang="es-ES_tradnl" sz="1400" noProof="0" dirty="0" err="1">
                 <a:solidFill>
                   <a:srgbClr val="0070C0"/>
                 </a:solidFill>
@@ -3306,7 +2496,7 @@
               <a:t>scipy</a:t>
             </a:r>
             <a:r>
-              <a:rPr lang="es-ES_tradnl" sz="1400" dirty="0">
+              <a:rPr lang="es-ES_tradnl" sz="1400" noProof="0" dirty="0">
                 <a:solidFill>
                   <a:srgbClr val="0070C0"/>
                 </a:solidFill>
@@ -3316,7 +2506,7 @@
               <a:t>/</a:t>
             </a:r>
             <a:r>
-              <a:rPr lang="es-ES_tradnl" sz="1400" dirty="0" err="1">
+              <a:rPr lang="es-ES_tradnl" sz="1400" noProof="0" dirty="0" err="1">
                 <a:solidFill>
                   <a:srgbClr val="0070C0"/>
                 </a:solidFill>
@@ -3326,7 +2516,7 @@
               <a:t>reference</a:t>
             </a:r>
             <a:r>
-              <a:rPr lang="es-ES_tradnl" sz="1400" dirty="0">
+              <a:rPr lang="es-ES_tradnl" sz="1400" noProof="0" dirty="0">
                 <a:solidFill>
                   <a:srgbClr val="0070C0"/>
                 </a:solidFill>
@@ -3336,7 +2526,7 @@
               <a:t>/</a:t>
             </a:r>
             <a:r>
-              <a:rPr lang="es-ES_tradnl" sz="1400" dirty="0" err="1">
+              <a:rPr lang="es-ES_tradnl" sz="1400" noProof="0" dirty="0" err="1">
                 <a:solidFill>
                   <a:srgbClr val="0070C0"/>
                 </a:solidFill>
@@ -3346,7 +2536,7 @@
               <a:t>generated</a:t>
             </a:r>
             <a:r>
-              <a:rPr lang="es-ES_tradnl" sz="1400" dirty="0">
+              <a:rPr lang="es-ES_tradnl" sz="1400" noProof="0" dirty="0">
                 <a:solidFill>
                   <a:srgbClr val="0070C0"/>
                 </a:solidFill>
@@ -3356,7 +2546,7 @@
               <a:t>/</a:t>
             </a:r>
             <a:r>
-              <a:rPr lang="es-ES_tradnl" sz="1400" dirty="0" err="1">
+              <a:rPr lang="es-ES_tradnl" sz="1400" noProof="0" dirty="0" err="1">
                 <a:solidFill>
                   <a:srgbClr val="0070C0"/>
                 </a:solidFill>
@@ -3365,7 +2555,7 @@
               </a:rPr>
               <a:t>scipy.interpolate.lagrange.html</a:t>
             </a:r>
-            <a:endParaRPr lang="es-ES_tradnl" sz="1400" dirty="0">
+            <a:endParaRPr lang="es-ES_tradnl" sz="1400" noProof="0" dirty="0">
               <a:solidFill>
                 <a:srgbClr val="0070C0"/>
               </a:solidFill>
@@ -3404,7 +2594,7 @@
           <a:lstStyle/>
           <a:p>
             <a:r>
-              <a:rPr lang="es-ES_tradnl" sz="1400" dirty="0">
+              <a:rPr lang="es-ES_tradnl" sz="1400" noProof="0" dirty="0">
                 <a:solidFill>
                   <a:srgbClr val="0070C0"/>
                 </a:solidFill>
@@ -3414,7 +2604,7 @@
               <a:t>https://</a:t>
             </a:r>
             <a:r>
-              <a:rPr lang="es-ES_tradnl" sz="1400" dirty="0" err="1">
+              <a:rPr lang="es-ES_tradnl" sz="1400" noProof="0" dirty="0" err="1">
                 <a:solidFill>
                   <a:srgbClr val="0070C0"/>
                 </a:solidFill>
@@ -3424,7 +2614,7 @@
               <a:t>numpy.org</a:t>
             </a:r>
             <a:r>
-              <a:rPr lang="es-ES_tradnl" sz="1400" dirty="0">
+              <a:rPr lang="es-ES_tradnl" sz="1400" noProof="0" dirty="0">
                 <a:solidFill>
                   <a:srgbClr val="0070C0"/>
                 </a:solidFill>
@@ -3434,7 +2624,7 @@
               <a:t>/</a:t>
             </a:r>
             <a:r>
-              <a:rPr lang="es-ES_tradnl" sz="1400" dirty="0" err="1">
+              <a:rPr lang="es-ES_tradnl" sz="1400" noProof="0" dirty="0" err="1">
                 <a:solidFill>
                   <a:srgbClr val="0070C0"/>
                 </a:solidFill>
@@ -3444,7 +2634,7 @@
               <a:t>doc</a:t>
             </a:r>
             <a:r>
-              <a:rPr lang="es-ES_tradnl" sz="1400" dirty="0">
+              <a:rPr lang="es-ES_tradnl" sz="1400" noProof="0" dirty="0">
                 <a:solidFill>
                   <a:srgbClr val="0070C0"/>
                 </a:solidFill>
@@ -3454,7 +2644,7 @@
               <a:t>/</a:t>
             </a:r>
             <a:r>
-              <a:rPr lang="es-ES_tradnl" sz="1400" dirty="0" err="1">
+              <a:rPr lang="es-ES_tradnl" sz="1400" noProof="0" dirty="0" err="1">
                 <a:solidFill>
                   <a:srgbClr val="0070C0"/>
                 </a:solidFill>
@@ -3464,7 +2654,7 @@
               <a:t>stable</a:t>
             </a:r>
             <a:r>
-              <a:rPr lang="es-ES_tradnl" sz="1400" dirty="0">
+              <a:rPr lang="es-ES_tradnl" sz="1400" noProof="0" dirty="0">
                 <a:solidFill>
                   <a:srgbClr val="0070C0"/>
                 </a:solidFill>
@@ -3474,7 +2664,7 @@
               <a:t>/</a:t>
             </a:r>
             <a:r>
-              <a:rPr lang="es-ES_tradnl" sz="1400" dirty="0" err="1">
+              <a:rPr lang="es-ES_tradnl" sz="1400" noProof="0" dirty="0" err="1">
                 <a:solidFill>
                   <a:srgbClr val="0070C0"/>
                 </a:solidFill>
@@ -3484,7 +2674,7 @@
               <a:t>reference</a:t>
             </a:r>
             <a:r>
-              <a:rPr lang="es-ES_tradnl" sz="1400" dirty="0">
+              <a:rPr lang="es-ES_tradnl" sz="1400" noProof="0" dirty="0">
                 <a:solidFill>
                   <a:srgbClr val="0070C0"/>
                 </a:solidFill>
@@ -3494,7 +2684,7 @@
               <a:t>/</a:t>
             </a:r>
             <a:r>
-              <a:rPr lang="es-ES_tradnl" sz="1400" dirty="0" err="1">
+              <a:rPr lang="es-ES_tradnl" sz="1400" noProof="0" dirty="0" err="1">
                 <a:solidFill>
                   <a:srgbClr val="0070C0"/>
                 </a:solidFill>
@@ -3503,7 +2693,7 @@
               </a:rPr>
               <a:t>routines.polynomials-package.html#module-numpy.polynomial</a:t>
             </a:r>
-            <a:endParaRPr lang="es-ES_tradnl" sz="1400" dirty="0">
+            <a:endParaRPr lang="es-ES_tradnl" sz="1400" noProof="0" dirty="0">
               <a:solidFill>
                 <a:srgbClr val="0070C0"/>
               </a:solidFill>
@@ -3557,262 +2747,15 @@
           <a:lstStyle/>
           <a:p>
             <a:r>
-              <a:rPr lang="en-US" sz="2400" dirty="0">
+              <a:rPr lang="es-ES_tradnl" sz="2400" noProof="0" dirty="0">
                 <a:solidFill>
                   <a:schemeClr val="bg1"/>
                 </a:solidFill>
                 <a:latin typeface="Arial" panose="020B0604020202020204" pitchFamily="34" charset="0"/>
                 <a:cs typeface="Arial" panose="020B0604020202020204" pitchFamily="34" charset="0"/>
               </a:rPr>
-              <a:t>¿</a:t>
-            </a:r>
-            <a:r>
-              <a:rPr lang="en-US" sz="2400" dirty="0" err="1">
-                <a:solidFill>
-                  <a:schemeClr val="bg1"/>
-                </a:solidFill>
-                <a:latin typeface="Arial" panose="020B0604020202020204" pitchFamily="34" charset="0"/>
-                <a:cs typeface="Arial" panose="020B0604020202020204" pitchFamily="34" charset="0"/>
-              </a:rPr>
-              <a:t>Será</a:t>
-            </a:r>
-            <a:r>
-              <a:rPr lang="en-US" sz="2400" dirty="0">
-                <a:solidFill>
-                  <a:schemeClr val="bg1"/>
-                </a:solidFill>
-                <a:latin typeface="Arial" panose="020B0604020202020204" pitchFamily="34" charset="0"/>
-                <a:cs typeface="Arial" panose="020B0604020202020204" pitchFamily="34" charset="0"/>
-              </a:rPr>
-              <a:t> possible </a:t>
-            </a:r>
-            <a:r>
-              <a:rPr lang="en-US" sz="2400" dirty="0" err="1">
-                <a:solidFill>
-                  <a:schemeClr val="bg1"/>
-                </a:solidFill>
-                <a:latin typeface="Arial" panose="020B0604020202020204" pitchFamily="34" charset="0"/>
-                <a:cs typeface="Arial" panose="020B0604020202020204" pitchFamily="34" charset="0"/>
-              </a:rPr>
-              <a:t>construir</a:t>
-            </a:r>
-            <a:r>
-              <a:rPr lang="en-US" sz="2400" dirty="0">
-                <a:solidFill>
-                  <a:schemeClr val="bg1"/>
-                </a:solidFill>
-                <a:latin typeface="Arial" panose="020B0604020202020204" pitchFamily="34" charset="0"/>
-                <a:cs typeface="Arial" panose="020B0604020202020204" pitchFamily="34" charset="0"/>
-              </a:rPr>
-              <a:t> </a:t>
-            </a:r>
-            <a:r>
-              <a:rPr lang="en-US" sz="2400" dirty="0" err="1">
-                <a:solidFill>
-                  <a:schemeClr val="bg1"/>
-                </a:solidFill>
-                <a:latin typeface="Arial" panose="020B0604020202020204" pitchFamily="34" charset="0"/>
-                <a:cs typeface="Arial" panose="020B0604020202020204" pitchFamily="34" charset="0"/>
-              </a:rPr>
-              <a:t>polinomios</a:t>
-            </a:r>
-            <a:r>
-              <a:rPr lang="en-US" sz="2400" dirty="0">
-                <a:solidFill>
-                  <a:schemeClr val="bg1"/>
-                </a:solidFill>
-                <a:latin typeface="Arial" panose="020B0604020202020204" pitchFamily="34" charset="0"/>
-                <a:cs typeface="Arial" panose="020B0604020202020204" pitchFamily="34" charset="0"/>
-              </a:rPr>
-              <a:t> </a:t>
-            </a:r>
-            <a:r>
-              <a:rPr lang="en-US" sz="2400" dirty="0" err="1">
-                <a:solidFill>
-                  <a:schemeClr val="bg1"/>
-                </a:solidFill>
-                <a:latin typeface="Arial" panose="020B0604020202020204" pitchFamily="34" charset="0"/>
-                <a:cs typeface="Arial" panose="020B0604020202020204" pitchFamily="34" charset="0"/>
-              </a:rPr>
-              <a:t>que</a:t>
-            </a:r>
-            <a:r>
-              <a:rPr lang="en-US" sz="2400" dirty="0">
-                <a:solidFill>
-                  <a:schemeClr val="bg1"/>
-                </a:solidFill>
-                <a:latin typeface="Arial" panose="020B0604020202020204" pitchFamily="34" charset="0"/>
-                <a:cs typeface="Arial" panose="020B0604020202020204" pitchFamily="34" charset="0"/>
-              </a:rPr>
-              <a:t> no solo </a:t>
-            </a:r>
-            <a:r>
-              <a:rPr lang="en-US" sz="2400" dirty="0" err="1">
-                <a:solidFill>
-                  <a:schemeClr val="bg1"/>
-                </a:solidFill>
-                <a:latin typeface="Arial" panose="020B0604020202020204" pitchFamily="34" charset="0"/>
-                <a:cs typeface="Arial" panose="020B0604020202020204" pitchFamily="34" charset="0"/>
-              </a:rPr>
-              <a:t>coincidan</a:t>
-            </a:r>
-            <a:r>
-              <a:rPr lang="en-US" sz="2400" dirty="0">
-                <a:solidFill>
-                  <a:schemeClr val="bg1"/>
-                </a:solidFill>
-                <a:latin typeface="Arial" panose="020B0604020202020204" pitchFamily="34" charset="0"/>
-                <a:cs typeface="Arial" panose="020B0604020202020204" pitchFamily="34" charset="0"/>
-              </a:rPr>
-              <a:t> con la </a:t>
-            </a:r>
-            <a:r>
-              <a:rPr lang="en-US" sz="2400" dirty="0" err="1">
-                <a:solidFill>
-                  <a:schemeClr val="bg1"/>
-                </a:solidFill>
-                <a:latin typeface="Arial" panose="020B0604020202020204" pitchFamily="34" charset="0"/>
-                <a:cs typeface="Arial" panose="020B0604020202020204" pitchFamily="34" charset="0"/>
-              </a:rPr>
-              <a:t>función</a:t>
-            </a:r>
-            <a:r>
-              <a:rPr lang="en-US" sz="2400" dirty="0">
-                <a:solidFill>
-                  <a:schemeClr val="bg1"/>
-                </a:solidFill>
-                <a:latin typeface="Arial" panose="020B0604020202020204" pitchFamily="34" charset="0"/>
-                <a:cs typeface="Arial" panose="020B0604020202020204" pitchFamily="34" charset="0"/>
-              </a:rPr>
-              <a:t> </a:t>
-            </a:r>
-            <a:r>
-              <a:rPr lang="en-US" sz="2400" dirty="0" err="1">
-                <a:solidFill>
-                  <a:schemeClr val="bg1"/>
-                </a:solidFill>
-                <a:latin typeface="Arial" panose="020B0604020202020204" pitchFamily="34" charset="0"/>
-                <a:cs typeface="Arial" panose="020B0604020202020204" pitchFamily="34" charset="0"/>
-              </a:rPr>
-              <a:t>sino</a:t>
-            </a:r>
-            <a:r>
-              <a:rPr lang="en-US" sz="2400" dirty="0">
-                <a:solidFill>
-                  <a:schemeClr val="bg1"/>
-                </a:solidFill>
-                <a:latin typeface="Arial" panose="020B0604020202020204" pitchFamily="34" charset="0"/>
-                <a:cs typeface="Arial" panose="020B0604020202020204" pitchFamily="34" charset="0"/>
-              </a:rPr>
-              <a:t> con sus </a:t>
-            </a:r>
-            <a:r>
-              <a:rPr lang="en-US" sz="2400" dirty="0" err="1">
-                <a:solidFill>
-                  <a:schemeClr val="bg1"/>
-                </a:solidFill>
-                <a:latin typeface="Arial" panose="020B0604020202020204" pitchFamily="34" charset="0"/>
-                <a:cs typeface="Arial" panose="020B0604020202020204" pitchFamily="34" charset="0"/>
-              </a:rPr>
-              <a:t>derivadas</a:t>
-            </a:r>
-            <a:r>
-              <a:rPr lang="en-US" sz="2400" dirty="0">
-                <a:solidFill>
-                  <a:schemeClr val="bg1"/>
-                </a:solidFill>
-                <a:latin typeface="Arial" panose="020B0604020202020204" pitchFamily="34" charset="0"/>
-                <a:cs typeface="Arial" panose="020B0604020202020204" pitchFamily="34" charset="0"/>
-              </a:rPr>
-              <a:t>? Y ¿</a:t>
-            </a:r>
-            <a:r>
-              <a:rPr lang="en-US" sz="2400" dirty="0" err="1">
-                <a:solidFill>
-                  <a:schemeClr val="bg1"/>
-                </a:solidFill>
-                <a:latin typeface="Arial" panose="020B0604020202020204" pitchFamily="34" charset="0"/>
-                <a:cs typeface="Arial" panose="020B0604020202020204" pitchFamily="34" charset="0"/>
-              </a:rPr>
-              <a:t>dónde</a:t>
-            </a:r>
-            <a:r>
-              <a:rPr lang="en-US" sz="2400" dirty="0">
-                <a:solidFill>
-                  <a:schemeClr val="bg1"/>
-                </a:solidFill>
-                <a:latin typeface="Arial" panose="020B0604020202020204" pitchFamily="34" charset="0"/>
-                <a:cs typeface="Arial" panose="020B0604020202020204" pitchFamily="34" charset="0"/>
-              </a:rPr>
-              <a:t> es </a:t>
-            </a:r>
-            <a:r>
-              <a:rPr lang="en-US" sz="2400" dirty="0" err="1">
-                <a:solidFill>
-                  <a:schemeClr val="bg1"/>
-                </a:solidFill>
-                <a:latin typeface="Arial" panose="020B0604020202020204" pitchFamily="34" charset="0"/>
-                <a:cs typeface="Arial" panose="020B0604020202020204" pitchFamily="34" charset="0"/>
-              </a:rPr>
-              <a:t>mejor</a:t>
-            </a:r>
-            <a:r>
-              <a:rPr lang="en-US" sz="2400" dirty="0">
-                <a:solidFill>
-                  <a:schemeClr val="bg1"/>
-                </a:solidFill>
-                <a:latin typeface="Arial" panose="020B0604020202020204" pitchFamily="34" charset="0"/>
-                <a:cs typeface="Arial" panose="020B0604020202020204" pitchFamily="34" charset="0"/>
-              </a:rPr>
-              <a:t> </a:t>
-            </a:r>
-            <a:r>
-              <a:rPr lang="en-US" sz="2400" dirty="0" err="1">
-                <a:solidFill>
-                  <a:schemeClr val="bg1"/>
-                </a:solidFill>
-                <a:latin typeface="Arial" panose="020B0604020202020204" pitchFamily="34" charset="0"/>
-                <a:cs typeface="Arial" panose="020B0604020202020204" pitchFamily="34" charset="0"/>
-              </a:rPr>
-              <a:t>tomar</a:t>
-            </a:r>
-            <a:r>
-              <a:rPr lang="en-US" sz="2400" dirty="0">
-                <a:solidFill>
-                  <a:schemeClr val="bg1"/>
-                </a:solidFill>
-                <a:latin typeface="Arial" panose="020B0604020202020204" pitchFamily="34" charset="0"/>
-                <a:cs typeface="Arial" panose="020B0604020202020204" pitchFamily="34" charset="0"/>
-              </a:rPr>
-              <a:t> </a:t>
-            </a:r>
-            <a:r>
-              <a:rPr lang="en-US" sz="2400" dirty="0" err="1">
-                <a:solidFill>
-                  <a:schemeClr val="bg1"/>
-                </a:solidFill>
-                <a:latin typeface="Arial" panose="020B0604020202020204" pitchFamily="34" charset="0"/>
-                <a:cs typeface="Arial" panose="020B0604020202020204" pitchFamily="34" charset="0"/>
-              </a:rPr>
-              <a:t>datos</a:t>
-            </a:r>
-            <a:r>
-              <a:rPr lang="en-US" sz="2400" dirty="0">
-                <a:solidFill>
-                  <a:schemeClr val="bg1"/>
-                </a:solidFill>
-                <a:latin typeface="Arial" panose="020B0604020202020204" pitchFamily="34" charset="0"/>
-                <a:cs typeface="Arial" panose="020B0604020202020204" pitchFamily="34" charset="0"/>
-              </a:rPr>
-              <a:t>?</a:t>
-            </a:r>
-            <a:endParaRPr lang="es-ES_tradnl" sz="2400" dirty="0">
-              <a:solidFill>
-                <a:schemeClr val="bg1"/>
-              </a:solidFill>
-              <a:latin typeface="Arial" panose="020B0604020202020204" pitchFamily="34" charset="0"/>
-              <a:cs typeface="Arial" panose="020B0604020202020204" pitchFamily="34" charset="0"/>
-            </a:endParaRPr>
+              <a:t>¿Será posible construir polinomios que no solo coincidan con la función sino con sus derivadas? y ¿dónde es mejor tomar datos?</a:t>
+            </a:r>
           </a:p>
         </p:txBody>
       </p:sp>
@@ -3831,14 +2774,22 @@
           <p:nvPr/>
         </p:nvPicPr>
         <p:blipFill>
-          <a:blip r:embed="rId2"/>
+          <a:blip r:embed="rId2">
+            <a:duotone>
+              <a:schemeClr val="accent3">
+                <a:shade val="45000"/>
+                <a:satMod val="135000"/>
+              </a:schemeClr>
+              <a:prstClr val="white"/>
+            </a:duotone>
+          </a:blip>
           <a:stretch>
             <a:fillRect/>
           </a:stretch>
         </p:blipFill>
         <p:spPr>
           <a:xfrm>
-            <a:off x="6352689" y="1447800"/>
+            <a:off x="6347776" y="1422236"/>
             <a:ext cx="5054563" cy="1800147"/>
           </a:xfrm>
           <a:prstGeom prst="rect">
